--- a/figures/ppt/progressive-widening.pptx
+++ b/figures/ppt/progressive-widening.pptx
@@ -104,6 +104,11 @@
       </a:defRPr>
     </a:lvl9pPr>
   </p:defaultTextStyle>
+  <p:extLst>
+    <p:ext uri="{EFAFB233-063F-42B5-8137-9DF3F51BA10A}">
+      <p15:sldGuideLst xmlns:p15="http://schemas.microsoft.com/office/powerpoint/2012/main"/>
+    </p:ext>
+  </p:extLst>
 </p:presentation>
 </file>
 
@@ -238,7 +243,7 @@
           <a:p>
             <a:fld id="{602830C5-6A57-45F4-9735-253231CED120}" type="datetimeFigureOut">
               <a:rPr lang="en-AU" smtClean="0"/>
-              <a:t>22/05/2025</a:t>
+              <a:t>23/05/2025</a:t>
             </a:fld>
             <a:endParaRPr lang="en-AU"/>
           </a:p>
@@ -408,7 +413,7 @@
           <a:p>
             <a:fld id="{602830C5-6A57-45F4-9735-253231CED120}" type="datetimeFigureOut">
               <a:rPr lang="en-AU" smtClean="0"/>
-              <a:t>22/05/2025</a:t>
+              <a:t>23/05/2025</a:t>
             </a:fld>
             <a:endParaRPr lang="en-AU"/>
           </a:p>
@@ -588,7 +593,7 @@
           <a:p>
             <a:fld id="{602830C5-6A57-45F4-9735-253231CED120}" type="datetimeFigureOut">
               <a:rPr lang="en-AU" smtClean="0"/>
-              <a:t>22/05/2025</a:t>
+              <a:t>23/05/2025</a:t>
             </a:fld>
             <a:endParaRPr lang="en-AU"/>
           </a:p>
@@ -758,7 +763,7 @@
           <a:p>
             <a:fld id="{602830C5-6A57-45F4-9735-253231CED120}" type="datetimeFigureOut">
               <a:rPr lang="en-AU" smtClean="0"/>
-              <a:t>22/05/2025</a:t>
+              <a:t>23/05/2025</a:t>
             </a:fld>
             <a:endParaRPr lang="en-AU"/>
           </a:p>
@@ -1004,7 +1009,7 @@
           <a:p>
             <a:fld id="{602830C5-6A57-45F4-9735-253231CED120}" type="datetimeFigureOut">
               <a:rPr lang="en-AU" smtClean="0"/>
-              <a:t>22/05/2025</a:t>
+              <a:t>23/05/2025</a:t>
             </a:fld>
             <a:endParaRPr lang="en-AU"/>
           </a:p>
@@ -1236,7 +1241,7 @@
           <a:p>
             <a:fld id="{602830C5-6A57-45F4-9735-253231CED120}" type="datetimeFigureOut">
               <a:rPr lang="en-AU" smtClean="0"/>
-              <a:t>22/05/2025</a:t>
+              <a:t>23/05/2025</a:t>
             </a:fld>
             <a:endParaRPr lang="en-AU"/>
           </a:p>
@@ -1603,7 +1608,7 @@
           <a:p>
             <a:fld id="{602830C5-6A57-45F4-9735-253231CED120}" type="datetimeFigureOut">
               <a:rPr lang="en-AU" smtClean="0"/>
-              <a:t>22/05/2025</a:t>
+              <a:t>23/05/2025</a:t>
             </a:fld>
             <a:endParaRPr lang="en-AU"/>
           </a:p>
@@ -1721,7 +1726,7 @@
           <a:p>
             <a:fld id="{602830C5-6A57-45F4-9735-253231CED120}" type="datetimeFigureOut">
               <a:rPr lang="en-AU" smtClean="0"/>
-              <a:t>22/05/2025</a:t>
+              <a:t>23/05/2025</a:t>
             </a:fld>
             <a:endParaRPr lang="en-AU"/>
           </a:p>
@@ -1816,7 +1821,7 @@
           <a:p>
             <a:fld id="{602830C5-6A57-45F4-9735-253231CED120}" type="datetimeFigureOut">
               <a:rPr lang="en-AU" smtClean="0"/>
-              <a:t>22/05/2025</a:t>
+              <a:t>23/05/2025</a:t>
             </a:fld>
             <a:endParaRPr lang="en-AU"/>
           </a:p>
@@ -2093,7 +2098,7 @@
           <a:p>
             <a:fld id="{602830C5-6A57-45F4-9735-253231CED120}" type="datetimeFigureOut">
               <a:rPr lang="en-AU" smtClean="0"/>
-              <a:t>22/05/2025</a:t>
+              <a:t>23/05/2025</a:t>
             </a:fld>
             <a:endParaRPr lang="en-AU"/>
           </a:p>
@@ -2350,7 +2355,7 @@
           <a:p>
             <a:fld id="{602830C5-6A57-45F4-9735-253231CED120}" type="datetimeFigureOut">
               <a:rPr lang="en-AU" smtClean="0"/>
-              <a:t>22/05/2025</a:t>
+              <a:t>23/05/2025</a:t>
             </a:fld>
             <a:endParaRPr lang="en-AU"/>
           </a:p>
@@ -2563,7 +2568,7 @@
           <a:p>
             <a:fld id="{602830C5-6A57-45F4-9735-253231CED120}" type="datetimeFigureOut">
               <a:rPr lang="en-AU" smtClean="0"/>
-              <a:t>22/05/2025</a:t>
+              <a:t>23/05/2025</a:t>
             </a:fld>
             <a:endParaRPr lang="en-AU"/>
           </a:p>
@@ -3217,7 +3222,7 @@
         </p:nvSpPr>
         <p:spPr>
           <a:xfrm>
-            <a:off x="3519272" y="1749552"/>
+            <a:off x="3464477" y="1711920"/>
             <a:ext cx="2637688" cy="338554"/>
           </a:xfrm>
           <a:prstGeom prst="rect">
@@ -3234,7 +3239,7 @@
             <a:pPr algn="ctr"/>
             <a:r>
               <a:rPr lang="en-AU" sz="1600" b="1" dirty="0"/>
-              <a:t>Current Child Nodes (n=2)</a:t>
+              <a:t>Current Child Nodes</a:t>
             </a:r>
           </a:p>
         </p:txBody>
@@ -3321,7 +3326,7 @@
                   </a:schemeClr>
                 </a:solidFill>
               </a:rPr>
-              <a:t>&gt; </a:t>
+              <a:t>= </a:t>
             </a:r>
             <a:r>
               <a:rPr lang="en-AU" sz="1600" b="1" dirty="0" err="1">
@@ -3603,7 +3608,7 @@
         </p:nvSpPr>
         <p:spPr>
           <a:xfrm>
-            <a:off x="833671" y="1748796"/>
+            <a:off x="837916" y="1718021"/>
             <a:ext cx="1963480" cy="338554"/>
           </a:xfrm>
           <a:prstGeom prst="rect">
